--- a/cmsc125/ostep/slides/01.Virtualization/17.Free-space_Management.pptx
+++ b/cmsc125/ostep/slides/01.Virtualization/17.Free-space_Management.pptx
@@ -266,7 +266,7 @@
           <a:p>
             <a:fld id="{050F0499-AE52-4672-879B-3107B2FC2A9F}" type="datetimeFigureOut">
               <a:rPr lang="ko-KR" altLang="en-US" smtClean="0"/>
-              <a:t>2021-10-26</a:t>
+              <a:t>2024-10-10</a:t>
             </a:fld>
             <a:endParaRPr lang="ko-KR" altLang="en-US"/>
           </a:p>
@@ -5244,14 +5244,14 @@
           <a:p>
             <a:r>
               <a:rPr lang="en-US" altLang="ko-KR" dirty="0"/>
-              <a:t>Building heap and putting a free list </a:t>
+              <a:t>Building the heap and putting a free list </a:t>
             </a:r>
           </a:p>
           <a:p>
             <a:pPr lvl="1"/>
             <a:r>
               <a:rPr lang="en-US" altLang="ko-KR" dirty="0"/>
-              <a:t>Assume that the heap is built with </a:t>
+              <a:t>Assume that the heap is built with the </a:t>
             </a:r>
             <a:r>
               <a:rPr lang="en-US" altLang="ko-KR" dirty="0" err="1">
@@ -15761,7 +15761,7 @@
             </a:r>
             <a:r>
               <a:rPr lang="en-US" altLang="ko-KR" dirty="0"/>
-              <a:t> in</a:t>
+              <a:t> system calls in</a:t>
             </a:r>
             <a:r>
               <a:rPr lang="ko-KR" altLang="en-US" dirty="0"/>
@@ -18294,7 +18294,7 @@
           <a:p>
             <a:r>
               <a:rPr lang="en-US" altLang="ko-KR" dirty="0"/>
-              <a:t>What about First Fit and Best Fit?</a:t>
+              <a:t>What about First Fit and Next Fit?</a:t>
             </a:r>
             <a:endParaRPr lang="ko-KR" altLang="en-US" dirty="0"/>
           </a:p>
@@ -19666,11 +19666,11 @@
             </a:r>
             <a:r>
               <a:rPr lang="en-US" altLang="ko-KR" dirty="0" err="1"/>
-              <a:t>inodes</a:t>
+              <a:t>i</a:t>
             </a:r>
             <a:r>
               <a:rPr lang="en-US" altLang="ko-KR" dirty="0"/>
-              <a:t>, etc.</a:t>
+              <a:t>-nodes, etc.</a:t>
             </a:r>
           </a:p>
           <a:p>
@@ -19818,11 +19818,11 @@
             </a:r>
             <a:r>
               <a:rPr lang="en-US" altLang="ko-KR" dirty="0" err="1"/>
-              <a:t>inodes</a:t>
+              <a:t>i</a:t>
             </a:r>
             <a:r>
               <a:rPr lang="en-US" altLang="ko-KR" dirty="0"/>
-              <a:t>, etc.</a:t>
+              <a:t>-nodes, etc.</a:t>
             </a:r>
           </a:p>
           <a:p>
